--- a/word-drafts/figures/SchemaRegistry-FigTypes.pptx
+++ b/word-drafts/figures/SchemaRegistry-FigTypes.pptx
@@ -3760,7 +3760,7 @@
         <p:spPr>
           <a:xfrm>
             <a:off x="2667000" y="1228725"/>
-            <a:ext cx="485775" cy="123825"/>
+            <a:ext cx="609600" cy="123825"/>
           </a:xfrm>
           <a:prstGeom prst="rect">
             <a:avLst/>
@@ -3832,7 +3832,7 @@
         <p:spPr>
           <a:xfrm>
             <a:off x="3952875" y="2314575"/>
-            <a:ext cx="485775" cy="123825"/>
+            <a:ext cx="609600" cy="123825"/>
           </a:xfrm>
           <a:prstGeom prst="rect">
             <a:avLst/>
@@ -3904,7 +3904,7 @@
         <p:spPr>
           <a:xfrm>
             <a:off x="5238750" y="3400425"/>
-            <a:ext cx="485775" cy="123825"/>
+            <a:ext cx="609600" cy="123825"/>
           </a:xfrm>
           <a:prstGeom prst="rect">
             <a:avLst/>
@@ -4093,7 +4093,7 @@
         <p:spPr>
           <a:xfrm>
             <a:off x="4595812" y="4486275"/>
-            <a:ext cx="495300" cy="123825"/>
+            <a:ext cx="619125" cy="123825"/>
           </a:xfrm>
           <a:prstGeom prst="rect">
             <a:avLst/>
@@ -4243,7 +4243,7 @@
         <p:spPr>
           <a:xfrm>
             <a:off x="3952875" y="6657975"/>
-            <a:ext cx="495300" cy="123825"/>
+            <a:ext cx="619125" cy="123825"/>
           </a:xfrm>
           <a:prstGeom prst="rect">
             <a:avLst/>
